--- a/docs/thesis/Defence_Muzrabov_Farrukhsho_v3.pptx
+++ b/docs/thesis/Defence_Muzrabov_Farrukhsho_v3.pptx
@@ -1595,7 +1595,7 @@
           <a:p>
             <a:fld id="{F93BF913-1031-40B6-BDEB-F3FABAFA4F6E}" type="datetimeFigureOut">
               <a:rPr lang="en-IN" smtClean="0"/>
-              <a:t>31-05-2026</a:t>
+              <a:t>09-06-2026</a:t>
             </a:fld>
             <a:endParaRPr lang="en-IN"/>
           </a:p>
@@ -1795,7 +1795,7 @@
           <a:p>
             <a:fld id="{F93BF913-1031-40B6-BDEB-F3FABAFA4F6E}" type="datetimeFigureOut">
               <a:rPr lang="en-IN" smtClean="0"/>
-              <a:t>31-05-2026</a:t>
+              <a:t>09-06-2026</a:t>
             </a:fld>
             <a:endParaRPr lang="en-IN"/>
           </a:p>
@@ -2005,7 +2005,7 @@
           <a:p>
             <a:fld id="{F93BF913-1031-40B6-BDEB-F3FABAFA4F6E}" type="datetimeFigureOut">
               <a:rPr lang="en-IN" smtClean="0"/>
-              <a:t>31-05-2026</a:t>
+              <a:t>09-06-2026</a:t>
             </a:fld>
             <a:endParaRPr lang="en-IN"/>
           </a:p>
@@ -2205,7 +2205,7 @@
           <a:p>
             <a:fld id="{F93BF913-1031-40B6-BDEB-F3FABAFA4F6E}" type="datetimeFigureOut">
               <a:rPr lang="en-IN" smtClean="0"/>
-              <a:t>31-05-2026</a:t>
+              <a:t>09-06-2026</a:t>
             </a:fld>
             <a:endParaRPr lang="en-IN"/>
           </a:p>
@@ -2481,7 +2481,7 @@
           <a:p>
             <a:fld id="{F93BF913-1031-40B6-BDEB-F3FABAFA4F6E}" type="datetimeFigureOut">
               <a:rPr lang="en-IN" smtClean="0"/>
-              <a:t>31-05-2026</a:t>
+              <a:t>09-06-2026</a:t>
             </a:fld>
             <a:endParaRPr lang="en-IN"/>
           </a:p>
@@ -2749,7 +2749,7 @@
           <a:p>
             <a:fld id="{F93BF913-1031-40B6-BDEB-F3FABAFA4F6E}" type="datetimeFigureOut">
               <a:rPr lang="en-IN" smtClean="0"/>
-              <a:t>31-05-2026</a:t>
+              <a:t>09-06-2026</a:t>
             </a:fld>
             <a:endParaRPr lang="en-IN"/>
           </a:p>
@@ -3164,7 +3164,7 @@
           <a:p>
             <a:fld id="{F93BF913-1031-40B6-BDEB-F3FABAFA4F6E}" type="datetimeFigureOut">
               <a:rPr lang="en-IN" smtClean="0"/>
-              <a:t>31-05-2026</a:t>
+              <a:t>09-06-2026</a:t>
             </a:fld>
             <a:endParaRPr lang="en-IN"/>
           </a:p>
@@ -3306,7 +3306,7 @@
           <a:p>
             <a:fld id="{F93BF913-1031-40B6-BDEB-F3FABAFA4F6E}" type="datetimeFigureOut">
               <a:rPr lang="en-IN" smtClean="0"/>
-              <a:t>31-05-2026</a:t>
+              <a:t>09-06-2026</a:t>
             </a:fld>
             <a:endParaRPr lang="en-IN"/>
           </a:p>
@@ -3419,7 +3419,7 @@
           <a:p>
             <a:fld id="{F93BF913-1031-40B6-BDEB-F3FABAFA4F6E}" type="datetimeFigureOut">
               <a:rPr lang="en-IN" smtClean="0"/>
-              <a:t>31-05-2026</a:t>
+              <a:t>09-06-2026</a:t>
             </a:fld>
             <a:endParaRPr lang="en-IN"/>
           </a:p>
@@ -3732,7 +3732,7 @@
           <a:p>
             <a:fld id="{F93BF913-1031-40B6-BDEB-F3FABAFA4F6E}" type="datetimeFigureOut">
               <a:rPr lang="en-IN" smtClean="0"/>
-              <a:t>31-05-2026</a:t>
+              <a:t>09-06-2026</a:t>
             </a:fld>
             <a:endParaRPr lang="en-IN"/>
           </a:p>
@@ -4021,7 +4021,7 @@
           <a:p>
             <a:fld id="{F93BF913-1031-40B6-BDEB-F3FABAFA4F6E}" type="datetimeFigureOut">
               <a:rPr lang="en-IN" smtClean="0"/>
-              <a:t>31-05-2026</a:t>
+              <a:t>09-06-2026</a:t>
             </a:fld>
             <a:endParaRPr lang="en-IN"/>
           </a:p>
@@ -4264,7 +4264,7 @@
           <a:p>
             <a:fld id="{F93BF913-1031-40B6-BDEB-F3FABAFA4F6E}" type="datetimeFigureOut">
               <a:rPr lang="en-IN" smtClean="0"/>
-              <a:t>31-05-2026</a:t>
+              <a:t>09-06-2026</a:t>
             </a:fld>
             <a:endParaRPr lang="en-IN"/>
           </a:p>
@@ -5099,7 +5099,7 @@
                   <a:srgbClr val="595959"/>
                 </a:solidFill>
               </a:rPr>
-              <a:t>Chayko</a:t>
+              <a:t>Caiko</a:t>
             </a:r>
             <a:r>
               <a:rPr lang="ru-RU" sz="1300" dirty="0">
@@ -5110,12 +5110,20 @@
               <a:t> </a:t>
             </a:r>
             <a:r>
+              <a:rPr lang="en-US" sz="1300" dirty="0">
+                <a:solidFill>
+                  <a:srgbClr val="595959"/>
+                </a:solidFill>
+              </a:rPr>
+              <a:t>   </a:t>
+            </a:r>
+            <a:r>
               <a:rPr sz="1300" dirty="0">
                 <a:solidFill>
                   <a:srgbClr val="595959"/>
                 </a:solidFill>
               </a:rPr>
-              <a:t>  |   </a:t>
+              <a:t>|   </a:t>
             </a:r>
             <a:r>
               <a:rPr lang="en-US" sz="1300" dirty="0">
